--- a/documentation/Architecture_Defense.pptx
+++ b/documentation/Architecture_Defense.pptx
@@ -1125,7 +1125,7 @@
           <a:p>
             <a:r>
               <a:rPr lang="en-US" dirty="0"/>
-              <a:t>[Backup — for Q&amp;A, not the 5-min clock] Flip here if the room goes quiet or to pre-empt. These are the four most likely probes: failure handling, MCP-vs-API, scale, and my worst failure mode. Answer briefly, invite the next question.</a:t>
+              <a:t>[Backup - for Q&amp;A, not the 5-min clock] Flip here if the room goes quiet or to pre-empt. Five likely probes: failure handling, MCP-vs-API, scale, production deployment, and my worst failure mode. On deployment: Railway for dev (demo data = no PHI); AWS under a free Artifact BAA for prod with PHI only in HIPAA-eligible services; and the sidecar is portable into the practice's own OpenEMR environment via standard FHIR/OAuth. Answer briefly, invite the next question.</a:t>
             </a:r>
             <a:endParaRPr lang="en-US" dirty="0"/>
           </a:p>
@@ -6487,12 +6487,12 @@
         </p:nvSpPr>
         <p:spPr>
           <a:xfrm>
-            <a:off x="822960" y="1737360"/>
-            <a:ext cx="10515600" cy="1078992"/>
+            <a:off x="822960" y="1517904"/>
+            <a:ext cx="10515600" cy="896112"/>
           </a:xfrm>
           <a:prstGeom prst="roundRect">
             <a:avLst>
-              <a:gd name="adj" fmla="val 6780"/>
+              <a:gd name="adj" fmla="val 8163"/>
             </a:avLst>
           </a:prstGeom>
           <a:solidFill>
@@ -6509,24 +6509,24 @@
         </p:nvSpPr>
         <p:spPr>
           <a:xfrm>
-            <a:off x="1051560" y="1847088"/>
-            <a:ext cx="10058400" cy="365760"/>
-          </a:xfrm>
-          <a:prstGeom prst="rect">
-            <a:avLst/>
-          </a:prstGeom>
-          <a:noFill/>
-          <a:ln/>
-        </p:spPr>
-        <p:txBody>
-          <a:bodyPr wrap="square" lIns="0" tIns="0" rIns="0" bIns="0" rtlCol="0" anchor="ctr"/>
-          <a:lstStyle/>
-          <a:p>
-            <a:pPr indent="0" marL="0">
-              <a:buNone/>
-            </a:pPr>
-            <a:r>
-              <a:rPr lang="en-US" sz="1450" b="1" dirty="0">
+            <a:off x="1051560" y="1609344"/>
+            <a:ext cx="10058400" cy="310896"/>
+          </a:xfrm>
+          <a:prstGeom prst="rect">
+            <a:avLst/>
+          </a:prstGeom>
+          <a:noFill/>
+          <a:ln/>
+        </p:spPr>
+        <p:txBody>
+          <a:bodyPr wrap="square" lIns="0" tIns="0" rIns="0" bIns="0" rtlCol="0" anchor="ctr"/>
+          <a:lstStyle/>
+          <a:p>
+            <a:pPr indent="0" marL="0">
+              <a:buNone/>
+            </a:pPr>
+            <a:r>
+              <a:rPr lang="en-US" sz="1350" b="1" dirty="0">
                 <a:solidFill>
                   <a:srgbClr val="02C39A"/>
                 </a:solidFill>
@@ -6536,7 +6536,7 @@
               </a:rPr>
               <a:t>Tool fails / record incomplete?</a:t>
             </a:r>
-            <a:endParaRPr lang="en-US" sz="1450" dirty="0"/>
+            <a:endParaRPr lang="en-US" sz="1350" dirty="0"/>
           </a:p>
         </p:txBody>
       </p:sp>
@@ -6548,24 +6548,24 @@
         </p:nvSpPr>
         <p:spPr>
           <a:xfrm>
-            <a:off x="1051560" y="2212848"/>
-            <a:ext cx="10149840" cy="548640"/>
-          </a:xfrm>
-          <a:prstGeom prst="rect">
-            <a:avLst/>
-          </a:prstGeom>
-          <a:noFill/>
-          <a:ln/>
-        </p:spPr>
-        <p:txBody>
-          <a:bodyPr wrap="square" lIns="0" tIns="0" rIns="0" bIns="0" rtlCol="0" anchor="ctr"/>
-          <a:lstStyle/>
-          <a:p>
-            <a:pPr indent="0" marL="0">
-              <a:buNone/>
-            </a:pPr>
-            <a:r>
-              <a:rPr lang="en-US" sz="1200" dirty="0">
+            <a:off x="1051560" y="1920240"/>
+            <a:ext cx="10195560" cy="438912"/>
+          </a:xfrm>
+          <a:prstGeom prst="rect">
+            <a:avLst/>
+          </a:prstGeom>
+          <a:noFill/>
+          <a:ln/>
+        </p:spPr>
+        <p:txBody>
+          <a:bodyPr wrap="square" lIns="0" tIns="0" rIns="0" bIns="0" rtlCol="0" anchor="ctr"/>
+          <a:lstStyle/>
+          <a:p>
+            <a:pPr indent="0" marL="0">
+              <a:buNone/>
+            </a:pPr>
+            <a:r>
+              <a:rPr lang="en-US" sz="1050" dirty="0">
                 <a:solidFill>
                   <a:srgbClr val="CFE6E6"/>
                 </a:solidFill>
@@ -6575,7 +6575,7 @@
               </a:rPr>
               <a:t>Per-tool timeout + bounded retry; degrade to deterministic source-cited data (no synthesis); never fabricate, never silent.</a:t>
             </a:r>
-            <a:endParaRPr lang="en-US" sz="1200" dirty="0"/>
+            <a:endParaRPr lang="en-US" sz="1050" dirty="0"/>
           </a:p>
         </p:txBody>
       </p:sp>
@@ -6587,12 +6587,12 @@
         </p:nvSpPr>
         <p:spPr>
           <a:xfrm>
-            <a:off x="822960" y="2926080"/>
-            <a:ext cx="10515600" cy="1078992"/>
+            <a:off x="822960" y="2532888"/>
+            <a:ext cx="10515600" cy="896112"/>
           </a:xfrm>
           <a:prstGeom prst="roundRect">
             <a:avLst>
-              <a:gd name="adj" fmla="val 6780"/>
+              <a:gd name="adj" fmla="val 8163"/>
             </a:avLst>
           </a:prstGeom>
           <a:solidFill>
@@ -6609,24 +6609,24 @@
         </p:nvSpPr>
         <p:spPr>
           <a:xfrm>
-            <a:off x="1051560" y="3035808"/>
-            <a:ext cx="10058400" cy="365760"/>
-          </a:xfrm>
-          <a:prstGeom prst="rect">
-            <a:avLst/>
-          </a:prstGeom>
-          <a:noFill/>
-          <a:ln/>
-        </p:spPr>
-        <p:txBody>
-          <a:bodyPr wrap="square" lIns="0" tIns="0" rIns="0" bIns="0" rtlCol="0" anchor="ctr"/>
-          <a:lstStyle/>
-          <a:p>
-            <a:pPr indent="0" marL="0">
-              <a:buNone/>
-            </a:pPr>
-            <a:r>
-              <a:rPr lang="en-US" sz="1450" b="1" dirty="0">
+            <a:off x="1051560" y="2624328"/>
+            <a:ext cx="10058400" cy="310896"/>
+          </a:xfrm>
+          <a:prstGeom prst="rect">
+            <a:avLst/>
+          </a:prstGeom>
+          <a:noFill/>
+          <a:ln/>
+        </p:spPr>
+        <p:txBody>
+          <a:bodyPr wrap="square" lIns="0" tIns="0" rIns="0" bIns="0" rtlCol="0" anchor="ctr"/>
+          <a:lstStyle/>
+          <a:p>
+            <a:pPr indent="0" marL="0">
+              <a:buNone/>
+            </a:pPr>
+            <a:r>
+              <a:rPr lang="en-US" sz="1350" b="1" dirty="0">
                 <a:solidFill>
                   <a:srgbClr val="02C39A"/>
                 </a:solidFill>
@@ -6636,7 +6636,7 @@
               </a:rPr>
               <a:t>Why MCP over a plain internal API?</a:t>
             </a:r>
-            <a:endParaRPr lang="en-US" sz="1450" dirty="0"/>
+            <a:endParaRPr lang="en-US" sz="1350" dirty="0"/>
           </a:p>
         </p:txBody>
       </p:sp>
@@ -6648,24 +6648,24 @@
         </p:nvSpPr>
         <p:spPr>
           <a:xfrm>
-            <a:off x="1051560" y="3401568"/>
-            <a:ext cx="10149840" cy="548640"/>
-          </a:xfrm>
-          <a:prstGeom prst="rect">
-            <a:avLst/>
-          </a:prstGeom>
-          <a:noFill/>
-          <a:ln/>
-        </p:spPr>
-        <p:txBody>
-          <a:bodyPr wrap="square" lIns="0" tIns="0" rIns="0" bIns="0" rtlCol="0" anchor="ctr"/>
-          <a:lstStyle/>
-          <a:p>
-            <a:pPr indent="0" marL="0">
-              <a:buNone/>
-            </a:pPr>
-            <a:r>
-              <a:rPr lang="en-US" sz="1200" dirty="0">
+            <a:off x="1051560" y="2935224"/>
+            <a:ext cx="10195560" cy="438912"/>
+          </a:xfrm>
+          <a:prstGeom prst="rect">
+            <a:avLst/>
+          </a:prstGeom>
+          <a:noFill/>
+          <a:ln/>
+        </p:spPr>
+        <p:txBody>
+          <a:bodyPr wrap="square" lIns="0" tIns="0" rIns="0" bIns="0" rtlCol="0" anchor="ctr"/>
+          <a:lstStyle/>
+          <a:p>
+            <a:pPr indent="0" marL="0">
+              <a:buNone/>
+            </a:pPr>
+            <a:r>
+              <a:rPr lang="en-US" sz="1050" dirty="0">
                 <a:solidFill>
                   <a:srgbClr val="CFE6E6"/>
                 </a:solidFill>
@@ -6675,7 +6675,7 @@
               </a:rPr>
               <a:t>Min-necessary + single audit choke point + reusable, testable tool contracts. Cost: an extra protocol hop — acceptable.</a:t>
             </a:r>
-            <a:endParaRPr lang="en-US" sz="1200" dirty="0"/>
+            <a:endParaRPr lang="en-US" sz="1050" dirty="0"/>
           </a:p>
         </p:txBody>
       </p:sp>
@@ -6687,12 +6687,12 @@
         </p:nvSpPr>
         <p:spPr>
           <a:xfrm>
-            <a:off x="822960" y="4114800"/>
-            <a:ext cx="10515600" cy="1078992"/>
+            <a:off x="822960" y="3547872"/>
+            <a:ext cx="10515600" cy="896112"/>
           </a:xfrm>
           <a:prstGeom prst="roundRect">
             <a:avLst>
-              <a:gd name="adj" fmla="val 6780"/>
+              <a:gd name="adj" fmla="val 8163"/>
             </a:avLst>
           </a:prstGeom>
           <a:solidFill>
@@ -6709,24 +6709,24 @@
         </p:nvSpPr>
         <p:spPr>
           <a:xfrm>
-            <a:off x="1051560" y="4224528"/>
-            <a:ext cx="10058400" cy="365760"/>
-          </a:xfrm>
-          <a:prstGeom prst="rect">
-            <a:avLst/>
-          </a:prstGeom>
-          <a:noFill/>
-          <a:ln/>
-        </p:spPr>
-        <p:txBody>
-          <a:bodyPr wrap="square" lIns="0" tIns="0" rIns="0" bIns="0" rtlCol="0" anchor="ctr"/>
-          <a:lstStyle/>
-          <a:p>
-            <a:pPr indent="0" marL="0">
-              <a:buNone/>
-            </a:pPr>
-            <a:r>
-              <a:rPr lang="en-US" sz="1450" b="1" dirty="0">
+            <a:off x="1051560" y="3639312"/>
+            <a:ext cx="10058400" cy="310896"/>
+          </a:xfrm>
+          <a:prstGeom prst="rect">
+            <a:avLst/>
+          </a:prstGeom>
+          <a:noFill/>
+          <a:ln/>
+        </p:spPr>
+        <p:txBody>
+          <a:bodyPr wrap="square" lIns="0" tIns="0" rIns="0" bIns="0" rtlCol="0" anchor="ctr"/>
+          <a:lstStyle/>
+          <a:p>
+            <a:pPr indent="0" marL="0">
+              <a:buNone/>
+            </a:pPr>
+            <a:r>
+              <a:rPr lang="en-US" sz="1350" b="1" dirty="0">
                 <a:solidFill>
                   <a:srgbClr val="02C39A"/>
                 </a:solidFill>
@@ -6736,7 +6736,7 @@
               </a:rPr>
               <a:t>Scale to 300 concurrent users?</a:t>
             </a:r>
-            <a:endParaRPr lang="en-US" sz="1450" dirty="0"/>
+            <a:endParaRPr lang="en-US" sz="1350" dirty="0"/>
           </a:p>
         </p:txBody>
       </p:sp>
@@ -6748,24 +6748,24 @@
         </p:nvSpPr>
         <p:spPr>
           <a:xfrm>
-            <a:off x="1051560" y="4590288"/>
-            <a:ext cx="10149840" cy="548640"/>
-          </a:xfrm>
-          <a:prstGeom prst="rect">
-            <a:avLst/>
-          </a:prstGeom>
-          <a:noFill/>
-          <a:ln/>
-        </p:spPr>
-        <p:txBody>
-          <a:bodyPr wrap="square" lIns="0" tIns="0" rIns="0" bIns="0" rtlCol="0" anchor="ctr"/>
-          <a:lstStyle/>
-          <a:p>
-            <a:pPr indent="0" marL="0">
-              <a:buNone/>
-            </a:pPr>
-            <a:r>
-              <a:rPr lang="en-US" sz="1200" dirty="0">
+            <a:off x="1051560" y="3950208"/>
+            <a:ext cx="10195560" cy="438912"/>
+          </a:xfrm>
+          <a:prstGeom prst="rect">
+            <a:avLst/>
+          </a:prstGeom>
+          <a:noFill/>
+          <a:ln/>
+        </p:spPr>
+        <p:txBody>
+          <a:bodyPr wrap="square" lIns="0" tIns="0" rIns="0" bIns="0" rtlCol="0" anchor="ctr"/>
+          <a:lstStyle/>
+          <a:p>
+            <a:pPr indent="0" marL="0">
+              <a:buNone/>
+            </a:pPr>
+            <a:r>
+              <a:rPr lang="en-US" sz="1050" dirty="0">
                 <a:solidFill>
                   <a:srgbClr val="CFE6E6"/>
                 </a:solidFill>
@@ -6775,7 +6775,7 @@
               </a:rPr>
               <a:t>Stateless sidecar horizontally; parallel tool calls; caching + model-routing; LLM rate-limit budgeting; queue for batch jobs.</a:t>
             </a:r>
-            <a:endParaRPr lang="en-US" sz="1200" dirty="0"/>
+            <a:endParaRPr lang="en-US" sz="1050" dirty="0"/>
           </a:p>
         </p:txBody>
       </p:sp>
@@ -6787,12 +6787,12 @@
         </p:nvSpPr>
         <p:spPr>
           <a:xfrm>
-            <a:off x="822960" y="5303520"/>
-            <a:ext cx="10515600" cy="1078992"/>
+            <a:off x="822960" y="4562856"/>
+            <a:ext cx="10515600" cy="896112"/>
           </a:xfrm>
           <a:prstGeom prst="roundRect">
             <a:avLst>
-              <a:gd name="adj" fmla="val 6780"/>
+              <a:gd name="adj" fmla="val 8163"/>
             </a:avLst>
           </a:prstGeom>
           <a:solidFill>
@@ -6809,24 +6809,24 @@
         </p:nvSpPr>
         <p:spPr>
           <a:xfrm>
-            <a:off x="1051560" y="5413248"/>
-            <a:ext cx="10058400" cy="365760"/>
-          </a:xfrm>
-          <a:prstGeom prst="rect">
-            <a:avLst/>
-          </a:prstGeom>
-          <a:noFill/>
-          <a:ln/>
-        </p:spPr>
-        <p:txBody>
-          <a:bodyPr wrap="square" lIns="0" tIns="0" rIns="0" bIns="0" rtlCol="0" anchor="ctr"/>
-          <a:lstStyle/>
-          <a:p>
-            <a:pPr indent="0" marL="0">
-              <a:buNone/>
-            </a:pPr>
-            <a:r>
-              <a:rPr lang="en-US" sz="1450" b="1" dirty="0">
+            <a:off x="1051560" y="4654296"/>
+            <a:ext cx="10058400" cy="310896"/>
+          </a:xfrm>
+          <a:prstGeom prst="rect">
+            <a:avLst/>
+          </a:prstGeom>
+          <a:noFill/>
+          <a:ln/>
+        </p:spPr>
+        <p:txBody>
+          <a:bodyPr wrap="square" lIns="0" tIns="0" rIns="0" bIns="0" rtlCol="0" anchor="ctr"/>
+          <a:lstStyle/>
+          <a:p>
+            <a:pPr indent="0" marL="0">
+              <a:buNone/>
+            </a:pPr>
+            <a:r>
+              <a:rPr lang="en-US" sz="1350" b="1" dirty="0">
                 <a:solidFill>
                   <a:srgbClr val="02C39A"/>
                 </a:solidFill>
@@ -6834,9 +6834,9 @@
                 <a:ea typeface="Cambria" pitchFamily="34" charset="-122"/>
                 <a:cs typeface="Cambria" pitchFamily="34" charset="-120"/>
               </a:rPr>
-              <a:t>Biggest failure mode you worry about?</a:t>
-            </a:r>
-            <a:endParaRPr lang="en-US" sz="1450" dirty="0"/>
+              <a:t>Where does this run in production?</a:t>
+            </a:r>
+            <a:endParaRPr lang="en-US" sz="1350" dirty="0"/>
           </a:p>
         </p:txBody>
       </p:sp>
@@ -6848,24 +6848,24 @@
         </p:nvSpPr>
         <p:spPr>
           <a:xfrm>
-            <a:off x="1051560" y="5779008"/>
-            <a:ext cx="10149840" cy="548640"/>
-          </a:xfrm>
-          <a:prstGeom prst="rect">
-            <a:avLst/>
-          </a:prstGeom>
-          <a:noFill/>
-          <a:ln/>
-        </p:spPr>
-        <p:txBody>
-          <a:bodyPr wrap="square" lIns="0" tIns="0" rIns="0" bIns="0" rtlCol="0" anchor="ctr"/>
-          <a:lstStyle/>
-          <a:p>
-            <a:pPr indent="0" marL="0">
-              <a:buNone/>
-            </a:pPr>
-            <a:r>
-              <a:rPr lang="en-US" sz="1200" dirty="0">
+            <a:off x="1051560" y="4965192"/>
+            <a:ext cx="10195560" cy="438912"/>
+          </a:xfrm>
+          <a:prstGeom prst="rect">
+            <a:avLst/>
+          </a:prstGeom>
+          <a:noFill/>
+          <a:ln/>
+        </p:spPr>
+        <p:txBody>
+          <a:bodyPr wrap="square" lIns="0" tIns="0" rIns="0" bIns="0" rtlCol="0" anchor="ctr"/>
+          <a:lstStyle/>
+          <a:p>
+            <a:pPr indent="0" marL="0">
+              <a:buNone/>
+            </a:pPr>
+            <a:r>
+              <a:rPr lang="en-US" sz="1050" dirty="0">
                 <a:solidFill>
                   <a:srgbClr val="CFE6E6"/>
                 </a:solidFill>
@@ -6873,9 +6873,109 @@
                 <a:ea typeface="Calibri" pitchFamily="34" charset="-122"/>
                 <a:cs typeface="Calibri" pitchFamily="34" charset="-120"/>
               </a:rPr>
+              <a:t>Railway for dev/demo (no PHI, by policy); AWS under a free Artifact BAA for prod; sidecar is portable into the practice's own OpenEMR env. Same container — host is a per-env decision.</a:t>
+            </a:r>
+            <a:endParaRPr lang="en-US" sz="1050" dirty="0"/>
+          </a:p>
+        </p:txBody>
+      </p:sp>
+      <p:sp>
+        <p:nvSpPr>
+          <p:cNvPr id="18" name="Shape 15"/>
+          <p:cNvSpPr/>
+          <p:nvPr/>
+        </p:nvSpPr>
+        <p:spPr>
+          <a:xfrm>
+            <a:off x="822960" y="5577840"/>
+            <a:ext cx="10515600" cy="896112"/>
+          </a:xfrm>
+          <a:prstGeom prst="roundRect">
+            <a:avLst>
+              <a:gd name="adj" fmla="val 8163"/>
+            </a:avLst>
+          </a:prstGeom>
+          <a:solidFill>
+            <a:srgbClr val="12474C"/>
+          </a:solidFill>
+          <a:ln/>
+        </p:spPr>
+      </p:sp>
+      <p:sp>
+        <p:nvSpPr>
+          <p:cNvPr id="19" name="Text 16"/>
+          <p:cNvSpPr/>
+          <p:nvPr/>
+        </p:nvSpPr>
+        <p:spPr>
+          <a:xfrm>
+            <a:off x="1051560" y="5669280"/>
+            <a:ext cx="10058400" cy="310896"/>
+          </a:xfrm>
+          <a:prstGeom prst="rect">
+            <a:avLst/>
+          </a:prstGeom>
+          <a:noFill/>
+          <a:ln/>
+        </p:spPr>
+        <p:txBody>
+          <a:bodyPr wrap="square" lIns="0" tIns="0" rIns="0" bIns="0" rtlCol="0" anchor="ctr"/>
+          <a:lstStyle/>
+          <a:p>
+            <a:pPr indent="0" marL="0">
+              <a:buNone/>
+            </a:pPr>
+            <a:r>
+              <a:rPr lang="en-US" sz="1350" b="1" dirty="0">
+                <a:solidFill>
+                  <a:srgbClr val="02C39A"/>
+                </a:solidFill>
+                <a:latin typeface="Cambria" pitchFamily="34" charset="0"/>
+                <a:ea typeface="Cambria" pitchFamily="34" charset="-122"/>
+                <a:cs typeface="Cambria" pitchFamily="34" charset="-120"/>
+              </a:rPr>
+              <a:t>Biggest failure mode you worry about?</a:t>
+            </a:r>
+            <a:endParaRPr lang="en-US" sz="1350" dirty="0"/>
+          </a:p>
+        </p:txBody>
+      </p:sp>
+      <p:sp>
+        <p:nvSpPr>
+          <p:cNvPr id="20" name="Text 17"/>
+          <p:cNvSpPr/>
+          <p:nvPr/>
+        </p:nvSpPr>
+        <p:spPr>
+          <a:xfrm>
+            <a:off x="1051560" y="5980176"/>
+            <a:ext cx="10195560" cy="438912"/>
+          </a:xfrm>
+          <a:prstGeom prst="rect">
+            <a:avLst/>
+          </a:prstGeom>
+          <a:noFill/>
+          <a:ln/>
+        </p:spPr>
+        <p:txBody>
+          <a:bodyPr wrap="square" lIns="0" tIns="0" rIns="0" bIns="0" rtlCol="0" anchor="ctr"/>
+          <a:lstStyle/>
+          <a:p>
+            <a:pPr indent="0" marL="0">
+              <a:buNone/>
+            </a:pPr>
+            <a:r>
+              <a:rPr lang="en-US" sz="1050" dirty="0">
+                <a:solidFill>
+                  <a:srgbClr val="CFE6E6"/>
+                </a:solidFill>
+                <a:latin typeface="Calibri" pitchFamily="34" charset="0"/>
+                <a:ea typeface="Calibri" pitchFamily="34" charset="-122"/>
+                <a:cs typeface="Calibri" pitchFamily="34" charset="-120"/>
+              </a:rPr>
               <a:t>Subtly-wrong synthesis that passes citation checks — mitigated by extractive framing + 'data as of', but not eliminated.</a:t>
             </a:r>
-            <a:endParaRPr lang="en-US" sz="1200" dirty="0"/>
+            <a:endParaRPr lang="en-US" sz="1050" dirty="0"/>
           </a:p>
         </p:txBody>
       </p:sp>
